--- a/templates/posts/october/05-10-2026-mon-ig-story-habitat-day.pptx
+++ b/templates/posts/october/05-10-2026-mon-ig-story-habitat-day.pptx
@@ -502,7 +502,7 @@
           <a:lstStyle/>
           <a:p>
             <a:r>
-              <a:t>Story. Source: Anthony, Bender and van der Heijden, PNAS, 2023, https://doi.org/10.1073/pnas.2304663120. Microscopy: assets/microscopy/testate-amoeba-encysting-40x-joy-kaluf.jpg (Joy Kaluf, per the file name). Leave y 1100 to 1450 empty for the poll sticker.</a:t>
+              <a:t>Story, scrapbook. Source: Anthony, Bender and van der Heijden, PNAS, 2023, https://doi.org/10.1073/pnas.2304663120. Microscopy print: assets/microscopy/testate-amoeba-encysting-40x-joy-kaluf.jpg (Joy Kaluf, per the file name). Leave y 1100 to 1450 empty for the poll sticker. Stickers are drawn shapes plus the nematode and fungal-hyphae cutouts.</a:t>
             </a:r>
           </a:p>
         </p:txBody>
@@ -3504,7 +3504,7 @@
     <p:bg>
       <p:bgPr>
         <a:solidFill>
-          <a:srgbClr val="22371F"/>
+          <a:srgbClr val="F4F1EA"/>
         </a:solidFill>
         <a:effectLst/>
       </p:bgPr>
@@ -3518,7 +3518,7 @@
       <p:grpSpPr/>
       <p:pic>
         <p:nvPicPr>
-          <p:cNvPr id="2" name="Picture 1" descr="3804856852232045979.jpg"/>
+          <p:cNvPr id="2" name="Picture 1" descr="paper-grain-cream.jpg"/>
           <p:cNvPicPr>
             <a:picLocks noChangeAspect="1"/>
           </p:cNvPicPr>
@@ -3547,16 +3547,129 @@
           <p:nvPr/>
         </p:nvSpPr>
         <p:spPr>
-          <a:xfrm>
-            <a:off x="0" y="0"/>
-            <a:ext cx="10287000" cy="18288000"/>
+          <a:xfrm rot="21420000">
+            <a:off x="2381250" y="1428750"/>
+            <a:ext cx="5760720" cy="6134100"/>
           </a:xfrm>
           <a:prstGeom prst="rect">
             <a:avLst/>
           </a:prstGeom>
           <a:solidFill>
-            <a:srgbClr val="22371F">
-              <a:alpha val="50000"/>
+            <a:srgbClr val="FFFDF7"/>
+          </a:solidFill>
+          <a:ln>
+            <a:noFill/>
+          </a:ln>
+          <a:effectLst>
+            <a:outerShdw blurRad="228600" dist="76200" dir="5400000" algn="t" rotWithShape="0">
+              <a:srgbClr val="000000">
+                <a:alpha val="30000"/>
+              </a:srgbClr>
+            </a:outerShdw>
+          </a:effectLst>
+        </p:spPr>
+        <p:style>
+          <a:lnRef idx="1">
+            <a:schemeClr val="accent1"/>
+          </a:lnRef>
+          <a:fillRef idx="3">
+            <a:schemeClr val="accent1"/>
+          </a:fillRef>
+          <a:effectRef idx="2">
+            <a:schemeClr val="accent1"/>
+          </a:effectRef>
+          <a:fontRef idx="minor">
+            <a:schemeClr val="lt1"/>
+          </a:fontRef>
+        </p:style>
+        <p:txBody>
+          <a:bodyPr rtlCol="0" anchor="ctr"/>
+          <a:lstStyle/>
+          <a:p>
+            <a:pPr algn="ctr"/>
+          </a:p>
+        </p:txBody>
+      </p:sp>
+      <p:pic>
+        <p:nvPicPr>
+          <p:cNvPr id="4" name="Picture 3" descr="1688363202230870748.jpg"/>
+          <p:cNvPicPr>
+            <a:picLocks noChangeAspect="1"/>
+          </p:cNvPicPr>
+          <p:nvPr/>
+        </p:nvPicPr>
+        <p:blipFill>
+          <a:blip r:embed="rId4"/>
+          <a:stretch>
+            <a:fillRect/>
+          </a:stretch>
+        </p:blipFill>
+        <p:spPr>
+          <a:xfrm rot="21420000">
+            <a:off x="2584839" y="1642365"/>
+            <a:ext cx="5334000" cy="5334000"/>
+          </a:xfrm>
+          <a:prstGeom prst="rect">
+            <a:avLst/>
+          </a:prstGeom>
+        </p:spPr>
+      </p:pic>
+      <p:sp>
+        <p:nvSpPr>
+          <p:cNvPr id="5" name="TextBox 4"/>
+          <p:cNvSpPr txBox="1"/>
+          <p:nvPr/>
+        </p:nvSpPr>
+        <p:spPr>
+          <a:xfrm rot="21420000">
+            <a:off x="2739773" y="6972308"/>
+            <a:ext cx="5334000" cy="586740"/>
+          </a:xfrm>
+          <a:prstGeom prst="rect">
+            <a:avLst/>
+          </a:prstGeom>
+          <a:noFill/>
+        </p:spPr>
+        <p:txBody>
+          <a:bodyPr wrap="square" lIns="0" rIns="0" tIns="0" bIns="0" anchor="ctr">
+            <a:spAutoFit/>
+          </a:bodyPr>
+          <a:lstStyle/>
+          <a:p>
+            <a:pPr algn="ctr">
+              <a:lnSpc>
+                <a:spcPct val="120000"/>
+              </a:lnSpc>
+            </a:pPr>
+            <a:r>
+              <a:rPr sz="1500" b="0" i="0">
+                <a:solidFill>
+                  <a:srgbClr val="6A665C"/>
+                </a:solidFill>
+                <a:latin typeface="Source Sans 3"/>
+              </a:rPr>
+              <a:t>Photo: Joy Kaluf</a:t>
+            </a:r>
+          </a:p>
+        </p:txBody>
+      </p:sp>
+      <p:sp>
+        <p:nvSpPr>
+          <p:cNvPr id="6" name="Rectangle 5"/>
+          <p:cNvSpPr/>
+          <p:nvPr/>
+        </p:nvSpPr>
+        <p:spPr>
+          <a:xfrm rot="240000">
+            <a:off x="4451985" y="1266825"/>
+            <a:ext cx="1619250" cy="438150"/>
+          </a:xfrm>
+          <a:prstGeom prst="rect">
+            <a:avLst/>
+          </a:prstGeom>
+          <a:solidFill>
+            <a:srgbClr val="DBE6A7">
+              <a:alpha val="70000"/>
             </a:srgbClr>
           </a:solidFill>
           <a:ln>
@@ -3586,16 +3699,974 @@
           </a:p>
         </p:txBody>
       </p:sp>
-      <p:sp>
-        <p:nvSpPr>
-          <p:cNvPr id="4" name="TextBox 3"/>
+      <p:pic>
+        <p:nvPicPr>
+          <p:cNvPr id="7" name="Picture 6" descr="trim-nematode-1.png"/>
+          <p:cNvPicPr>
+            <a:picLocks noChangeAspect="1"/>
+          </p:cNvPicPr>
+          <p:nvPr/>
+        </p:nvPicPr>
+        <p:blipFill>
+          <a:blip r:embed="rId5"/>
+          <a:stretch>
+            <a:fillRect/>
+          </a:stretch>
+        </p:blipFill>
+        <p:spPr>
+          <a:xfrm rot="19800000">
+            <a:off x="285750" y="-800475"/>
+            <a:ext cx="1905000" cy="7887450"/>
+          </a:xfrm>
+          <a:prstGeom prst="rect">
+            <a:avLst/>
+          </a:prstGeom>
+        </p:spPr>
+      </p:pic>
+      <p:grpSp>
+        <p:nvGrpSpPr>
+          <p:cNvPr id="8" name="Group 7"/>
+          <p:cNvGrpSpPr/>
+          <p:nvPr/>
+        </p:nvGrpSpPr>
+        <p:grpSpPr>
+          <a:xfrm rot="20700000">
+            <a:off x="0" y="0"/>
+            <a:ext cx="9858375" cy="3197541"/>
+            <a:chOff x="0" y="0"/>
+            <a:chExt cx="9858375" cy="3197541"/>
+          </a:xfrm>
+        </p:grpSpPr>
+        <p:sp>
+          <p:nvSpPr>
+            <p:cNvPr id="9" name="Arc 8"/>
+            <p:cNvSpPr/>
+            <p:nvPr/>
+          </p:nvSpPr>
+          <p:spPr>
+            <a:xfrm>
+              <a:off x="7980045" y="2762288"/>
+              <a:ext cx="275272" cy="176822"/>
+            </a:xfrm>
+            <a:prstGeom prst="arc">
+              <a:avLst/>
+            </a:prstGeom>
+            <a:noFill/>
+            <a:ln w="38100">
+              <a:solidFill>
+                <a:srgbClr val="156826"/>
+              </a:solidFill>
+            </a:ln>
+            <a:effectLst/>
+          </p:spPr>
+          <p:style>
+            <a:lnRef idx="1">
+              <a:schemeClr val="accent1"/>
+            </a:lnRef>
+            <a:fillRef idx="3">
+              <a:schemeClr val="accent1"/>
+            </a:fillRef>
+            <a:effectRef idx="2">
+              <a:schemeClr val="accent1"/>
+            </a:effectRef>
+            <a:fontRef idx="minor">
+              <a:schemeClr val="lt1"/>
+            </a:fontRef>
+          </p:style>
+          <p:txBody>
+            <a:bodyPr rtlCol="0" anchor="ctr"/>
+            <a:lstStyle/>
+            <a:p>
+              <a:pPr algn="ctr"/>
+            </a:p>
+          </p:txBody>
+        </p:sp>
+        <p:sp>
+          <p:nvSpPr>
+            <p:cNvPr id="10" name="Arc 9"/>
+            <p:cNvSpPr/>
+            <p:nvPr/>
+          </p:nvSpPr>
+          <p:spPr>
+            <a:xfrm rot="10800000">
+              <a:off x="7720965" y="2775889"/>
+              <a:ext cx="275272" cy="176822"/>
+            </a:xfrm>
+            <a:prstGeom prst="arc">
+              <a:avLst/>
+            </a:prstGeom>
+            <a:noFill/>
+            <a:ln w="38100">
+              <a:solidFill>
+                <a:srgbClr val="156826"/>
+              </a:solidFill>
+            </a:ln>
+            <a:effectLst/>
+          </p:spPr>
+          <p:style>
+            <a:lnRef idx="1">
+              <a:schemeClr val="accent1"/>
+            </a:lnRef>
+            <a:fillRef idx="3">
+              <a:schemeClr val="accent1"/>
+            </a:fillRef>
+            <a:effectRef idx="2">
+              <a:schemeClr val="accent1"/>
+            </a:effectRef>
+            <a:fontRef idx="minor">
+              <a:schemeClr val="lt1"/>
+            </a:fontRef>
+          </p:style>
+          <p:txBody>
+            <a:bodyPr rtlCol="0" anchor="ctr"/>
+            <a:lstStyle/>
+            <a:p>
+              <a:pPr algn="ctr"/>
+            </a:p>
+          </p:txBody>
+        </p:sp>
+        <p:sp>
+          <p:nvSpPr>
+            <p:cNvPr id="11" name="Arc 10"/>
+            <p:cNvSpPr/>
+            <p:nvPr/>
+          </p:nvSpPr>
+          <p:spPr>
+            <a:xfrm>
+              <a:off x="7461885" y="2762288"/>
+              <a:ext cx="275272" cy="176822"/>
+            </a:xfrm>
+            <a:prstGeom prst="arc">
+              <a:avLst/>
+            </a:prstGeom>
+            <a:noFill/>
+            <a:ln w="38100">
+              <a:solidFill>
+                <a:srgbClr val="156826"/>
+              </a:solidFill>
+            </a:ln>
+            <a:effectLst/>
+          </p:spPr>
+          <p:style>
+            <a:lnRef idx="1">
+              <a:schemeClr val="accent1"/>
+            </a:lnRef>
+            <a:fillRef idx="3">
+              <a:schemeClr val="accent1"/>
+            </a:fillRef>
+            <a:effectRef idx="2">
+              <a:schemeClr val="accent1"/>
+            </a:effectRef>
+            <a:fontRef idx="minor">
+              <a:schemeClr val="lt1"/>
+            </a:fontRef>
+          </p:style>
+          <p:txBody>
+            <a:bodyPr rtlCol="0" anchor="ctr"/>
+            <a:lstStyle/>
+            <a:p>
+              <a:pPr algn="ctr"/>
+            </a:p>
+          </p:txBody>
+        </p:sp>
+        <p:sp>
+          <p:nvSpPr>
+            <p:cNvPr id="12" name="Rounded Rectangle 11"/>
+            <p:cNvSpPr/>
+            <p:nvPr/>
+          </p:nvSpPr>
+          <p:spPr>
+            <a:xfrm>
+              <a:off x="8239125" y="2517457"/>
+              <a:ext cx="1619250" cy="680084"/>
+            </a:xfrm>
+            <a:prstGeom prst="roundRect">
+              <a:avLst>
+                <a:gd name="adj" fmla="val 50000"/>
+              </a:avLst>
+            </a:prstGeom>
+            <a:solidFill>
+              <a:srgbClr val="BFD8A6"/>
+            </a:solidFill>
+            <a:ln w="57150">
+              <a:solidFill>
+                <a:srgbClr val="FFFFFF"/>
+              </a:solidFill>
+            </a:ln>
+            <a:effectLst>
+              <a:outerShdw blurRad="228600" dist="76200" dir="5400000" algn="t" rotWithShape="0">
+                <a:srgbClr val="000000">
+                  <a:alpha val="30000"/>
+                </a:srgbClr>
+              </a:outerShdw>
+            </a:effectLst>
+          </p:spPr>
+          <p:style>
+            <a:lnRef idx="1">
+              <a:schemeClr val="accent1"/>
+            </a:lnRef>
+            <a:fillRef idx="3">
+              <a:schemeClr val="accent1"/>
+            </a:fillRef>
+            <a:effectRef idx="2">
+              <a:schemeClr val="accent1"/>
+            </a:effectRef>
+            <a:fontRef idx="minor">
+              <a:schemeClr val="lt1"/>
+            </a:fontRef>
+          </p:style>
+          <p:txBody>
+            <a:bodyPr rtlCol="0" anchor="ctr"/>
+            <a:lstStyle/>
+            <a:p>
+              <a:pPr algn="ctr"/>
+            </a:p>
+          </p:txBody>
+        </p:sp>
+        <p:sp>
+          <p:nvSpPr>
+            <p:cNvPr id="13" name="Oval 12"/>
+            <p:cNvSpPr/>
+            <p:nvPr/>
+          </p:nvSpPr>
+          <p:spPr>
+            <a:xfrm>
+              <a:off x="9099535" y="2797734"/>
+              <a:ext cx="51521" cy="51521"/>
+            </a:xfrm>
+            <a:prstGeom prst="ellipse">
+              <a:avLst/>
+            </a:prstGeom>
+            <a:solidFill>
+              <a:srgbClr val="22371F"/>
+            </a:solidFill>
+            <a:ln>
+              <a:noFill/>
+            </a:ln>
+            <a:effectLst/>
+          </p:spPr>
+          <p:style>
+            <a:lnRef idx="1">
+              <a:schemeClr val="accent1"/>
+            </a:lnRef>
+            <a:fillRef idx="3">
+              <a:schemeClr val="accent1"/>
+            </a:fillRef>
+            <a:effectRef idx="2">
+              <a:schemeClr val="accent1"/>
+            </a:effectRef>
+            <a:fontRef idx="minor">
+              <a:schemeClr val="lt1"/>
+            </a:fontRef>
+          </p:style>
+          <p:txBody>
+            <a:bodyPr rtlCol="0" anchor="ctr"/>
+            <a:lstStyle/>
+            <a:p>
+              <a:pPr algn="ctr"/>
+            </a:p>
+          </p:txBody>
+        </p:sp>
+        <p:sp>
+          <p:nvSpPr>
+            <p:cNvPr id="14" name="Oval 13"/>
+            <p:cNvSpPr/>
+            <p:nvPr/>
+          </p:nvSpPr>
+          <p:spPr>
+            <a:xfrm>
+              <a:off x="9335062" y="2797734"/>
+              <a:ext cx="51521" cy="51521"/>
+            </a:xfrm>
+            <a:prstGeom prst="ellipse">
+              <a:avLst/>
+            </a:prstGeom>
+            <a:solidFill>
+              <a:srgbClr val="22371F"/>
+            </a:solidFill>
+            <a:ln>
+              <a:noFill/>
+            </a:ln>
+            <a:effectLst/>
+          </p:spPr>
+          <p:style>
+            <a:lnRef idx="1">
+              <a:schemeClr val="accent1"/>
+            </a:lnRef>
+            <a:fillRef idx="3">
+              <a:schemeClr val="accent1"/>
+            </a:fillRef>
+            <a:effectRef idx="2">
+              <a:schemeClr val="accent1"/>
+            </a:effectRef>
+            <a:fontRef idx="minor">
+              <a:schemeClr val="lt1"/>
+            </a:fontRef>
+          </p:style>
+          <p:txBody>
+            <a:bodyPr rtlCol="0" anchor="ctr"/>
+            <a:lstStyle/>
+            <a:p>
+              <a:pPr algn="ctr"/>
+            </a:p>
+          </p:txBody>
+        </p:sp>
+        <p:sp>
+          <p:nvSpPr>
+            <p:cNvPr id="15" name="Block Arc 14"/>
+            <p:cNvSpPr/>
+            <p:nvPr/>
+          </p:nvSpPr>
+          <p:spPr>
+            <a:xfrm rot="10800000">
+              <a:off x="9162097" y="2838216"/>
+              <a:ext cx="161925" cy="117763"/>
+            </a:xfrm>
+            <a:prstGeom prst="blockArc">
+              <a:avLst>
+                <a:gd name="adj1" fmla="val 10800000"/>
+                <a:gd name="adj2" fmla="val 0"/>
+                <a:gd name="adj3" fmla="val 18000"/>
+              </a:avLst>
+            </a:prstGeom>
+            <a:solidFill>
+              <a:srgbClr val="22371F"/>
+            </a:solidFill>
+            <a:ln>
+              <a:noFill/>
+            </a:ln>
+            <a:effectLst/>
+          </p:spPr>
+          <p:style>
+            <a:lnRef idx="1">
+              <a:schemeClr val="accent1"/>
+            </a:lnRef>
+            <a:fillRef idx="3">
+              <a:schemeClr val="accent1"/>
+            </a:fillRef>
+            <a:effectRef idx="2">
+              <a:schemeClr val="accent1"/>
+            </a:effectRef>
+            <a:fontRef idx="minor">
+              <a:schemeClr val="lt1"/>
+            </a:fontRef>
+          </p:style>
+          <p:txBody>
+            <a:bodyPr rtlCol="0" anchor="ctr"/>
+            <a:lstStyle/>
+            <a:p>
+              <a:pPr algn="ctr"/>
+            </a:p>
+          </p:txBody>
+        </p:sp>
+      </p:grpSp>
+      <p:grpSp>
+        <p:nvGrpSpPr>
+          <p:cNvPr id="16" name="Group 15"/>
+          <p:cNvGrpSpPr/>
+          <p:nvPr/>
+        </p:nvGrpSpPr>
+        <p:grpSpPr>
+          <a:xfrm rot="1200000">
+            <a:off x="0" y="0"/>
+            <a:ext cx="9625965" cy="5753099"/>
+            <a:chOff x="0" y="0"/>
+            <a:chExt cx="9625965" cy="5753099"/>
+          </a:xfrm>
+        </p:grpSpPr>
+        <p:sp>
+          <p:nvSpPr>
+            <p:cNvPr id="17" name="Rectangle 16"/>
+            <p:cNvSpPr/>
+            <p:nvPr/>
+          </p:nvSpPr>
+          <p:spPr>
+            <a:xfrm rot="1500000">
+              <a:off x="8668906" y="5095359"/>
+              <a:ext cx="188595" cy="38100"/>
+            </a:xfrm>
+            <a:prstGeom prst="rect">
+              <a:avLst/>
+            </a:prstGeom>
+            <a:solidFill>
+              <a:srgbClr val="22371F"/>
+            </a:solidFill>
+            <a:ln>
+              <a:noFill/>
+            </a:ln>
+            <a:effectLst/>
+          </p:spPr>
+          <p:style>
+            <a:lnRef idx="1">
+              <a:schemeClr val="accent1"/>
+            </a:lnRef>
+            <a:fillRef idx="3">
+              <a:schemeClr val="accent1"/>
+            </a:fillRef>
+            <a:effectRef idx="2">
+              <a:schemeClr val="accent1"/>
+            </a:effectRef>
+            <a:fontRef idx="minor">
+              <a:schemeClr val="lt1"/>
+            </a:fontRef>
+          </p:style>
+          <p:txBody>
+            <a:bodyPr rtlCol="0" anchor="ctr"/>
+            <a:lstStyle/>
+            <a:p>
+              <a:pPr algn="ctr"/>
+            </a:p>
+          </p:txBody>
+        </p:sp>
+        <p:sp>
+          <p:nvSpPr>
+            <p:cNvPr id="18" name="Rectangle 17"/>
+            <p:cNvSpPr/>
+            <p:nvPr/>
+          </p:nvSpPr>
+          <p:spPr>
+            <a:xfrm>
+              <a:off x="8662035" y="5314950"/>
+              <a:ext cx="188595" cy="38100"/>
+            </a:xfrm>
+            <a:prstGeom prst="rect">
+              <a:avLst/>
+            </a:prstGeom>
+            <a:solidFill>
+              <a:srgbClr val="22371F"/>
+            </a:solidFill>
+            <a:ln>
+              <a:noFill/>
+            </a:ln>
+            <a:effectLst/>
+          </p:spPr>
+          <p:style>
+            <a:lnRef idx="1">
+              <a:schemeClr val="accent1"/>
+            </a:lnRef>
+            <a:fillRef idx="3">
+              <a:schemeClr val="accent1"/>
+            </a:fillRef>
+            <a:effectRef idx="2">
+              <a:schemeClr val="accent1"/>
+            </a:effectRef>
+            <a:fontRef idx="minor">
+              <a:schemeClr val="lt1"/>
+            </a:fontRef>
+          </p:style>
+          <p:txBody>
+            <a:bodyPr rtlCol="0" anchor="ctr"/>
+            <a:lstStyle/>
+            <a:p>
+              <a:pPr algn="ctr"/>
+            </a:p>
+          </p:txBody>
+        </p:sp>
+        <p:sp>
+          <p:nvSpPr>
+            <p:cNvPr id="19" name="Rectangle 18"/>
+            <p:cNvSpPr/>
+            <p:nvPr/>
+          </p:nvSpPr>
+          <p:spPr>
+            <a:xfrm rot="20100000">
+              <a:off x="8668906" y="5534540"/>
+              <a:ext cx="188595" cy="38100"/>
+            </a:xfrm>
+            <a:prstGeom prst="rect">
+              <a:avLst/>
+            </a:prstGeom>
+            <a:solidFill>
+              <a:srgbClr val="22371F"/>
+            </a:solidFill>
+            <a:ln>
+              <a:noFill/>
+            </a:ln>
+            <a:effectLst/>
+          </p:spPr>
+          <p:style>
+            <a:lnRef idx="1">
+              <a:schemeClr val="accent1"/>
+            </a:lnRef>
+            <a:fillRef idx="3">
+              <a:schemeClr val="accent1"/>
+            </a:fillRef>
+            <a:effectRef idx="2">
+              <a:schemeClr val="accent1"/>
+            </a:effectRef>
+            <a:fontRef idx="minor">
+              <a:schemeClr val="lt1"/>
+            </a:fontRef>
+          </p:style>
+          <p:txBody>
+            <a:bodyPr rtlCol="0" anchor="ctr"/>
+            <a:lstStyle/>
+            <a:p>
+              <a:pPr algn="ctr"/>
+            </a:p>
+          </p:txBody>
+        </p:sp>
+        <p:sp>
+          <p:nvSpPr>
+            <p:cNvPr id="20" name="Rectangle 19"/>
+            <p:cNvSpPr/>
+            <p:nvPr/>
+          </p:nvSpPr>
+          <p:spPr>
+            <a:xfrm rot="20100000">
+              <a:off x="9430498" y="5095359"/>
+              <a:ext cx="188595" cy="38100"/>
+            </a:xfrm>
+            <a:prstGeom prst="rect">
+              <a:avLst/>
+            </a:prstGeom>
+            <a:solidFill>
+              <a:srgbClr val="22371F"/>
+            </a:solidFill>
+            <a:ln>
+              <a:noFill/>
+            </a:ln>
+            <a:effectLst/>
+          </p:spPr>
+          <p:style>
+            <a:lnRef idx="1">
+              <a:schemeClr val="accent1"/>
+            </a:lnRef>
+            <a:fillRef idx="3">
+              <a:schemeClr val="accent1"/>
+            </a:fillRef>
+            <a:effectRef idx="2">
+              <a:schemeClr val="accent1"/>
+            </a:effectRef>
+            <a:fontRef idx="minor">
+              <a:schemeClr val="lt1"/>
+            </a:fontRef>
+          </p:style>
+          <p:txBody>
+            <a:bodyPr rtlCol="0" anchor="ctr"/>
+            <a:lstStyle/>
+            <a:p>
+              <a:pPr algn="ctr"/>
+            </a:p>
+          </p:txBody>
+        </p:sp>
+        <p:sp>
+          <p:nvSpPr>
+            <p:cNvPr id="21" name="Rectangle 20"/>
+            <p:cNvSpPr/>
+            <p:nvPr/>
+          </p:nvSpPr>
+          <p:spPr>
+            <a:xfrm>
+              <a:off x="9437370" y="5314950"/>
+              <a:ext cx="188595" cy="38100"/>
+            </a:xfrm>
+            <a:prstGeom prst="rect">
+              <a:avLst/>
+            </a:prstGeom>
+            <a:solidFill>
+              <a:srgbClr val="22371F"/>
+            </a:solidFill>
+            <a:ln>
+              <a:noFill/>
+            </a:ln>
+            <a:effectLst/>
+          </p:spPr>
+          <p:style>
+            <a:lnRef idx="1">
+              <a:schemeClr val="accent1"/>
+            </a:lnRef>
+            <a:fillRef idx="3">
+              <a:schemeClr val="accent1"/>
+            </a:fillRef>
+            <a:effectRef idx="2">
+              <a:schemeClr val="accent1"/>
+            </a:effectRef>
+            <a:fontRef idx="minor">
+              <a:schemeClr val="lt1"/>
+            </a:fontRef>
+          </p:style>
+          <p:txBody>
+            <a:bodyPr rtlCol="0" anchor="ctr"/>
+            <a:lstStyle/>
+            <a:p>
+              <a:pPr algn="ctr"/>
+            </a:p>
+          </p:txBody>
+        </p:sp>
+        <p:sp>
+          <p:nvSpPr>
+            <p:cNvPr id="22" name="Rectangle 21"/>
+            <p:cNvSpPr/>
+            <p:nvPr/>
+          </p:nvSpPr>
+          <p:spPr>
+            <a:xfrm rot="1500000">
+              <a:off x="9430498" y="5534540"/>
+              <a:ext cx="188595" cy="38100"/>
+            </a:xfrm>
+            <a:prstGeom prst="rect">
+              <a:avLst/>
+            </a:prstGeom>
+            <a:solidFill>
+              <a:srgbClr val="22371F"/>
+            </a:solidFill>
+            <a:ln>
+              <a:noFill/>
+            </a:ln>
+            <a:effectLst/>
+          </p:spPr>
+          <p:style>
+            <a:lnRef idx="1">
+              <a:schemeClr val="accent1"/>
+            </a:lnRef>
+            <a:fillRef idx="3">
+              <a:schemeClr val="accent1"/>
+            </a:fillRef>
+            <a:effectRef idx="2">
+              <a:schemeClr val="accent1"/>
+            </a:effectRef>
+            <a:fontRef idx="minor">
+              <a:schemeClr val="lt1"/>
+            </a:fontRef>
+          </p:style>
+          <p:txBody>
+            <a:bodyPr rtlCol="0" anchor="ctr"/>
+            <a:lstStyle/>
+            <a:p>
+              <a:pPr algn="ctr"/>
+            </a:p>
+          </p:txBody>
+        </p:sp>
+        <p:sp>
+          <p:nvSpPr>
+            <p:cNvPr id="23" name="Oval 22"/>
+            <p:cNvSpPr/>
+            <p:nvPr/>
+          </p:nvSpPr>
+          <p:spPr>
+            <a:xfrm>
+              <a:off x="8997315" y="4684395"/>
+              <a:ext cx="293370" cy="251460"/>
+            </a:xfrm>
+            <a:prstGeom prst="ellipse">
+              <a:avLst/>
+            </a:prstGeom>
+            <a:solidFill>
+              <a:srgbClr val="22371F"/>
+            </a:solidFill>
+            <a:ln w="57150">
+              <a:solidFill>
+                <a:srgbClr val="FFFFFF"/>
+              </a:solidFill>
+            </a:ln>
+            <a:effectLst/>
+          </p:spPr>
+          <p:style>
+            <a:lnRef idx="1">
+              <a:schemeClr val="accent1"/>
+            </a:lnRef>
+            <a:fillRef idx="3">
+              <a:schemeClr val="accent1"/>
+            </a:fillRef>
+            <a:effectRef idx="2">
+              <a:schemeClr val="accent1"/>
+            </a:effectRef>
+            <a:fontRef idx="minor">
+              <a:schemeClr val="lt1"/>
+            </a:fontRef>
+          </p:style>
+          <p:txBody>
+            <a:bodyPr rtlCol="0" anchor="ctr"/>
+            <a:lstStyle/>
+            <a:p>
+              <a:pPr algn="ctr"/>
+            </a:p>
+          </p:txBody>
+        </p:sp>
+        <p:sp>
+          <p:nvSpPr>
+            <p:cNvPr id="24" name="Oval 23"/>
+            <p:cNvSpPr/>
+            <p:nvPr/>
+          </p:nvSpPr>
+          <p:spPr>
+            <a:xfrm>
+              <a:off x="8829675" y="4862512"/>
+              <a:ext cx="628650" cy="890587"/>
+            </a:xfrm>
+            <a:prstGeom prst="ellipse">
+              <a:avLst/>
+            </a:prstGeom>
+            <a:solidFill>
+              <a:srgbClr val="2F4A3A"/>
+            </a:solidFill>
+            <a:ln w="57150">
+              <a:solidFill>
+                <a:srgbClr val="FFFFFF"/>
+              </a:solidFill>
+            </a:ln>
+            <a:effectLst>
+              <a:outerShdw blurRad="228600" dist="76200" dir="5400000" algn="t" rotWithShape="0">
+                <a:srgbClr val="000000">
+                  <a:alpha val="30000"/>
+                </a:srgbClr>
+              </a:outerShdw>
+            </a:effectLst>
+          </p:spPr>
+          <p:style>
+            <a:lnRef idx="1">
+              <a:schemeClr val="accent1"/>
+            </a:lnRef>
+            <a:fillRef idx="3">
+              <a:schemeClr val="accent1"/>
+            </a:fillRef>
+            <a:effectRef idx="2">
+              <a:schemeClr val="accent1"/>
+            </a:effectRef>
+            <a:fontRef idx="minor">
+              <a:schemeClr val="lt1"/>
+            </a:fontRef>
+          </p:style>
+          <p:txBody>
+            <a:bodyPr rtlCol="0" anchor="ctr"/>
+            <a:lstStyle/>
+            <a:p>
+              <a:pPr algn="ctr"/>
+            </a:p>
+          </p:txBody>
+        </p:sp>
+        <p:sp>
+          <p:nvSpPr>
+            <p:cNvPr id="25" name="Rectangle 24"/>
+            <p:cNvSpPr/>
+            <p:nvPr/>
+          </p:nvSpPr>
+          <p:spPr>
+            <a:xfrm>
+              <a:off x="9124950" y="4893945"/>
+              <a:ext cx="38100" cy="838200"/>
+            </a:xfrm>
+            <a:prstGeom prst="rect">
+              <a:avLst/>
+            </a:prstGeom>
+            <a:solidFill>
+              <a:srgbClr val="FFFFFF"/>
+            </a:solidFill>
+            <a:ln>
+              <a:noFill/>
+            </a:ln>
+            <a:effectLst/>
+          </p:spPr>
+          <p:style>
+            <a:lnRef idx="1">
+              <a:schemeClr val="accent1"/>
+            </a:lnRef>
+            <a:fillRef idx="3">
+              <a:schemeClr val="accent1"/>
+            </a:fillRef>
+            <a:effectRef idx="2">
+              <a:schemeClr val="accent1"/>
+            </a:effectRef>
+            <a:fontRef idx="minor">
+              <a:schemeClr val="lt1"/>
+            </a:fontRef>
+          </p:style>
+          <p:txBody>
+            <a:bodyPr rtlCol="0" anchor="ctr"/>
+            <a:lstStyle/>
+            <a:p>
+              <a:pPr algn="ctr"/>
+            </a:p>
+          </p:txBody>
+        </p:sp>
+        <p:sp>
+          <p:nvSpPr>
+            <p:cNvPr id="26" name="Oval 25"/>
+            <p:cNvSpPr/>
+            <p:nvPr/>
+          </p:nvSpPr>
+          <p:spPr>
+            <a:xfrm>
+              <a:off x="8955405" y="5134927"/>
+              <a:ext cx="83820" cy="83820"/>
+            </a:xfrm>
+            <a:prstGeom prst="ellipse">
+              <a:avLst/>
+            </a:prstGeom>
+            <a:solidFill>
+              <a:srgbClr val="DBE6A7"/>
+            </a:solidFill>
+            <a:ln>
+              <a:noFill/>
+            </a:ln>
+            <a:effectLst/>
+          </p:spPr>
+          <p:style>
+            <a:lnRef idx="1">
+              <a:schemeClr val="accent1"/>
+            </a:lnRef>
+            <a:fillRef idx="3">
+              <a:schemeClr val="accent1"/>
+            </a:fillRef>
+            <a:effectRef idx="2">
+              <a:schemeClr val="accent1"/>
+            </a:effectRef>
+            <a:fontRef idx="minor">
+              <a:schemeClr val="lt1"/>
+            </a:fontRef>
+          </p:style>
+          <p:txBody>
+            <a:bodyPr rtlCol="0" anchor="ctr"/>
+            <a:lstStyle/>
+            <a:p>
+              <a:pPr algn="ctr"/>
+            </a:p>
+          </p:txBody>
+        </p:sp>
+        <p:sp>
+          <p:nvSpPr>
+            <p:cNvPr id="27" name="Oval 26"/>
+            <p:cNvSpPr/>
+            <p:nvPr/>
+          </p:nvSpPr>
+          <p:spPr>
+            <a:xfrm>
+              <a:off x="9248775" y="5239702"/>
+              <a:ext cx="83820" cy="83820"/>
+            </a:xfrm>
+            <a:prstGeom prst="ellipse">
+              <a:avLst/>
+            </a:prstGeom>
+            <a:solidFill>
+              <a:srgbClr val="DBE6A7"/>
+            </a:solidFill>
+            <a:ln>
+              <a:noFill/>
+            </a:ln>
+            <a:effectLst/>
+          </p:spPr>
+          <p:style>
+            <a:lnRef idx="1">
+              <a:schemeClr val="accent1"/>
+            </a:lnRef>
+            <a:fillRef idx="3">
+              <a:schemeClr val="accent1"/>
+            </a:fillRef>
+            <a:effectRef idx="2">
+              <a:schemeClr val="accent1"/>
+            </a:effectRef>
+            <a:fontRef idx="minor">
+              <a:schemeClr val="lt1"/>
+            </a:fontRef>
+          </p:style>
+          <p:txBody>
+            <a:bodyPr rtlCol="0" anchor="ctr"/>
+            <a:lstStyle/>
+            <a:p>
+              <a:pPr algn="ctr"/>
+            </a:p>
+          </p:txBody>
+        </p:sp>
+        <p:sp>
+          <p:nvSpPr>
+            <p:cNvPr id="28" name="Oval 27"/>
+            <p:cNvSpPr/>
+            <p:nvPr/>
+          </p:nvSpPr>
+          <p:spPr>
+            <a:xfrm>
+              <a:off x="8976360" y="5449252"/>
+              <a:ext cx="83820" cy="83820"/>
+            </a:xfrm>
+            <a:prstGeom prst="ellipse">
+              <a:avLst/>
+            </a:prstGeom>
+            <a:solidFill>
+              <a:srgbClr val="DBE6A7"/>
+            </a:solidFill>
+            <a:ln>
+              <a:noFill/>
+            </a:ln>
+            <a:effectLst/>
+          </p:spPr>
+          <p:style>
+            <a:lnRef idx="1">
+              <a:schemeClr val="accent1"/>
+            </a:lnRef>
+            <a:fillRef idx="3">
+              <a:schemeClr val="accent1"/>
+            </a:fillRef>
+            <a:effectRef idx="2">
+              <a:schemeClr val="accent1"/>
+            </a:effectRef>
+            <a:fontRef idx="minor">
+              <a:schemeClr val="lt1"/>
+            </a:fontRef>
+          </p:style>
+          <p:txBody>
+            <a:bodyPr rtlCol="0" anchor="ctr"/>
+            <a:lstStyle/>
+            <a:p>
+              <a:pPr algn="ctr"/>
+            </a:p>
+          </p:txBody>
+        </p:sp>
+        <p:sp>
+          <p:nvSpPr>
+            <p:cNvPr id="29" name="Oval 28"/>
+            <p:cNvSpPr/>
+            <p:nvPr/>
+          </p:nvSpPr>
+          <p:spPr>
+            <a:xfrm>
+              <a:off x="9227820" y="5522595"/>
+              <a:ext cx="83820" cy="83820"/>
+            </a:xfrm>
+            <a:prstGeom prst="ellipse">
+              <a:avLst/>
+            </a:prstGeom>
+            <a:solidFill>
+              <a:srgbClr val="DBE6A7"/>
+            </a:solidFill>
+            <a:ln>
+              <a:noFill/>
+            </a:ln>
+            <a:effectLst/>
+          </p:spPr>
+          <p:style>
+            <a:lnRef idx="1">
+              <a:schemeClr val="accent1"/>
+            </a:lnRef>
+            <a:fillRef idx="3">
+              <a:schemeClr val="accent1"/>
+            </a:fillRef>
+            <a:effectRef idx="2">
+              <a:schemeClr val="accent1"/>
+            </a:effectRef>
+            <a:fontRef idx="minor">
+              <a:schemeClr val="lt1"/>
+            </a:fontRef>
+          </p:style>
+          <p:txBody>
+            <a:bodyPr rtlCol="0" anchor="ctr"/>
+            <a:lstStyle/>
+            <a:p>
+              <a:pPr algn="ctr"/>
+            </a:p>
+          </p:txBody>
+        </p:sp>
+      </p:grpSp>
+      <p:sp>
+        <p:nvSpPr>
+          <p:cNvPr id="30" name="TextBox 29"/>
           <p:cNvSpPr txBox="1"/>
           <p:nvPr/>
         </p:nvSpPr>
         <p:spPr>
           <a:xfrm>
-            <a:off x="952500" y="5715000"/>
-            <a:ext cx="8382000" cy="6130139"/>
+            <a:off x="952500" y="7429500"/>
+            <a:ext cx="8382000" cy="4703710"/>
           </a:xfrm>
           <a:prstGeom prst="rect">
             <a:avLst/>
@@ -3610,13 +4681,13 @@
           <a:p>
             <a:pPr algn="ctr">
               <a:lnSpc>
-                <a:spcPct val="110000"/>
+                <a:spcPct val="108000"/>
               </a:lnSpc>
             </a:pPr>
             <a:r>
-              <a:rPr sz="7200" b="1" i="0">
+              <a:rPr sz="7000" b="1" i="0">
                 <a:solidFill>
-                  <a:srgbClr val="F4F1EA"/>
+                  <a:srgbClr val="22371F"/>
                 </a:solidFill>
                 <a:latin typeface="Montserrat"/>
               </a:rPr>
@@ -3627,13 +4698,13 @@
       </p:sp>
       <p:sp>
         <p:nvSpPr>
-          <p:cNvPr id="5" name="TextBox 4"/>
+          <p:cNvPr id="31" name="TextBox 30"/>
           <p:cNvSpPr txBox="1"/>
           <p:nvPr/>
         </p:nvSpPr>
         <p:spPr>
           <a:xfrm>
-            <a:off x="952500" y="12130889"/>
+            <a:off x="952500" y="12323710"/>
             <a:ext cx="8382000" cy="1704553"/>
           </a:xfrm>
           <a:prstGeom prst="rect">
@@ -3655,7 +4726,7 @@
             <a:r>
               <a:rPr sz="4400" b="0" i="0">
                 <a:solidFill>
-                  <a:srgbClr val="DBE6A7"/>
+                  <a:srgbClr val="333130"/>
                 </a:solidFill>
                 <a:latin typeface="Source Sans 3"/>
               </a:rPr>
@@ -3666,14 +4737,1185 @@
       </p:sp>
       <p:pic>
         <p:nvPicPr>
-          <p:cNvPr id="6" name="Picture 5" descr="foundation-logo-white.png"/>
+          <p:cNvPr id="32" name="Picture 31" descr="trim-fungal-hyphae-1.png"/>
           <p:cNvPicPr>
             <a:picLocks noChangeAspect="1"/>
           </p:cNvPicPr>
           <p:nvPr/>
         </p:nvPicPr>
         <p:blipFill>
-          <a:blip r:embed="rId4"/>
+          <a:blip r:embed="rId6"/>
+          <a:stretch>
+            <a:fillRect/>
+          </a:stretch>
+        </p:blipFill>
+        <p:spPr>
+          <a:xfrm rot="6000000">
+            <a:off x="285750" y="14857892"/>
+            <a:ext cx="2857500" cy="3050215"/>
+          </a:xfrm>
+          <a:prstGeom prst="rect">
+            <a:avLst/>
+          </a:prstGeom>
+        </p:spPr>
+      </p:pic>
+      <p:grpSp>
+        <p:nvGrpSpPr>
+          <p:cNvPr id="33" name="Group 32"/>
+          <p:cNvGrpSpPr/>
+          <p:nvPr/>
+        </p:nvGrpSpPr>
+        <p:grpSpPr>
+          <a:xfrm>
+            <a:off x="0" y="0"/>
+            <a:ext cx="9048750" cy="17335500"/>
+            <a:chOff x="0" y="0"/>
+            <a:chExt cx="9048750" cy="17335500"/>
+          </a:xfrm>
+        </p:grpSpPr>
+        <p:sp>
+          <p:nvSpPr>
+            <p:cNvPr id="34" name="Rectangle 33"/>
+            <p:cNvSpPr/>
+            <p:nvPr/>
+          </p:nvSpPr>
+          <p:spPr>
+            <a:xfrm>
+              <a:off x="8058150" y="15773400"/>
+              <a:ext cx="76200" cy="1181100"/>
+            </a:xfrm>
+            <a:prstGeom prst="rect">
+              <a:avLst/>
+            </a:prstGeom>
+            <a:solidFill>
+              <a:srgbClr val="7FA05A"/>
+            </a:solidFill>
+            <a:ln>
+              <a:noFill/>
+            </a:ln>
+            <a:effectLst/>
+          </p:spPr>
+          <p:style>
+            <a:lnRef idx="1">
+              <a:schemeClr val="accent1"/>
+            </a:lnRef>
+            <a:fillRef idx="3">
+              <a:schemeClr val="accent1"/>
+            </a:fillRef>
+            <a:effectRef idx="2">
+              <a:schemeClr val="accent1"/>
+            </a:effectRef>
+            <a:fontRef idx="minor">
+              <a:schemeClr val="lt1"/>
+            </a:fontRef>
+          </p:style>
+          <p:txBody>
+            <a:bodyPr rtlCol="0" anchor="ctr"/>
+            <a:lstStyle/>
+            <a:p>
+              <a:pPr algn="ctr"/>
+            </a:p>
+          </p:txBody>
+        </p:sp>
+        <p:sp>
+          <p:nvSpPr>
+            <p:cNvPr id="35" name="Oval 34"/>
+            <p:cNvSpPr/>
+            <p:nvPr/>
+          </p:nvSpPr>
+          <p:spPr>
+            <a:xfrm rot="8700000">
+              <a:off x="7334250" y="15506700"/>
+              <a:ext cx="762000" cy="381000"/>
+            </a:xfrm>
+            <a:prstGeom prst="ellipse">
+              <a:avLst/>
+            </a:prstGeom>
+            <a:solidFill>
+              <a:srgbClr val="59A66C"/>
+            </a:solidFill>
+            <a:ln w="57150">
+              <a:solidFill>
+                <a:srgbClr val="FFFFFF"/>
+              </a:solidFill>
+            </a:ln>
+            <a:effectLst/>
+          </p:spPr>
+          <p:style>
+            <a:lnRef idx="1">
+              <a:schemeClr val="accent1"/>
+            </a:lnRef>
+            <a:fillRef idx="3">
+              <a:schemeClr val="accent1"/>
+            </a:fillRef>
+            <a:effectRef idx="2">
+              <a:schemeClr val="accent1"/>
+            </a:effectRef>
+            <a:fontRef idx="minor">
+              <a:schemeClr val="lt1"/>
+            </a:fontRef>
+          </p:style>
+          <p:txBody>
+            <a:bodyPr rtlCol="0" anchor="ctr"/>
+            <a:lstStyle/>
+            <a:p>
+              <a:pPr algn="ctr"/>
+            </a:p>
+          </p:txBody>
+        </p:sp>
+        <p:sp>
+          <p:nvSpPr>
+            <p:cNvPr id="36" name="Oval 35"/>
+            <p:cNvSpPr/>
+            <p:nvPr/>
+          </p:nvSpPr>
+          <p:spPr>
+            <a:xfrm rot="2100000">
+              <a:off x="8096250" y="15506700"/>
+              <a:ext cx="762000" cy="381000"/>
+            </a:xfrm>
+            <a:prstGeom prst="ellipse">
+              <a:avLst/>
+            </a:prstGeom>
+            <a:solidFill>
+              <a:srgbClr val="59A66C"/>
+            </a:solidFill>
+            <a:ln w="57150">
+              <a:solidFill>
+                <a:srgbClr val="FFFFFF"/>
+              </a:solidFill>
+            </a:ln>
+            <a:effectLst/>
+          </p:spPr>
+          <p:style>
+            <a:lnRef idx="1">
+              <a:schemeClr val="accent1"/>
+            </a:lnRef>
+            <a:fillRef idx="3">
+              <a:schemeClr val="accent1"/>
+            </a:fillRef>
+            <a:effectRef idx="2">
+              <a:schemeClr val="accent1"/>
+            </a:effectRef>
+            <a:fontRef idx="minor">
+              <a:schemeClr val="lt1"/>
+            </a:fontRef>
+          </p:style>
+          <p:txBody>
+            <a:bodyPr rtlCol="0" anchor="ctr"/>
+            <a:lstStyle/>
+            <a:p>
+              <a:pPr algn="ctr"/>
+            </a:p>
+          </p:txBody>
+        </p:sp>
+        <p:sp>
+          <p:nvSpPr>
+            <p:cNvPr id="37" name="Oval 36"/>
+            <p:cNvSpPr/>
+            <p:nvPr/>
+          </p:nvSpPr>
+          <p:spPr>
+            <a:xfrm>
+              <a:off x="7143750" y="16764000"/>
+              <a:ext cx="1905000" cy="571500"/>
+            </a:xfrm>
+            <a:prstGeom prst="ellipse">
+              <a:avLst/>
+            </a:prstGeom>
+            <a:solidFill>
+              <a:srgbClr val="4F3433"/>
+            </a:solidFill>
+            <a:ln w="57150">
+              <a:solidFill>
+                <a:srgbClr val="FFFFFF"/>
+              </a:solidFill>
+            </a:ln>
+            <a:effectLst>
+              <a:outerShdw blurRad="228600" dist="76200" dir="5400000" algn="t" rotWithShape="0">
+                <a:srgbClr val="000000">
+                  <a:alpha val="30000"/>
+                </a:srgbClr>
+              </a:outerShdw>
+            </a:effectLst>
+          </p:spPr>
+          <p:style>
+            <a:lnRef idx="1">
+              <a:schemeClr val="accent1"/>
+            </a:lnRef>
+            <a:fillRef idx="3">
+              <a:schemeClr val="accent1"/>
+            </a:fillRef>
+            <a:effectRef idx="2">
+              <a:schemeClr val="accent1"/>
+            </a:effectRef>
+            <a:fontRef idx="minor">
+              <a:schemeClr val="lt1"/>
+            </a:fontRef>
+          </p:style>
+          <p:txBody>
+            <a:bodyPr rtlCol="0" anchor="ctr"/>
+            <a:lstStyle/>
+            <a:p>
+              <a:pPr algn="ctr"/>
+            </a:p>
+          </p:txBody>
+        </p:sp>
+        <p:sp>
+          <p:nvSpPr>
+            <p:cNvPr id="38" name="Oval 37"/>
+            <p:cNvSpPr/>
+            <p:nvPr/>
+          </p:nvSpPr>
+          <p:spPr>
+            <a:xfrm>
+              <a:off x="7953375" y="16986005"/>
+              <a:ext cx="51288" cy="51288"/>
+            </a:xfrm>
+            <a:prstGeom prst="ellipse">
+              <a:avLst/>
+            </a:prstGeom>
+            <a:solidFill>
+              <a:srgbClr val="F4F1EA"/>
+            </a:solidFill>
+            <a:ln>
+              <a:noFill/>
+            </a:ln>
+            <a:effectLst/>
+          </p:spPr>
+          <p:style>
+            <a:lnRef idx="1">
+              <a:schemeClr val="accent1"/>
+            </a:lnRef>
+            <a:fillRef idx="3">
+              <a:schemeClr val="accent1"/>
+            </a:fillRef>
+            <a:effectRef idx="2">
+              <a:schemeClr val="accent1"/>
+            </a:effectRef>
+            <a:fontRef idx="minor">
+              <a:schemeClr val="lt1"/>
+            </a:fontRef>
+          </p:style>
+          <p:txBody>
+            <a:bodyPr rtlCol="0" anchor="ctr"/>
+            <a:lstStyle/>
+            <a:p>
+              <a:pPr algn="ctr"/>
+            </a:p>
+          </p:txBody>
+        </p:sp>
+        <p:sp>
+          <p:nvSpPr>
+            <p:cNvPr id="39" name="Oval 38"/>
+            <p:cNvSpPr/>
+            <p:nvPr/>
+          </p:nvSpPr>
+          <p:spPr>
+            <a:xfrm>
+              <a:off x="8187836" y="16986005"/>
+              <a:ext cx="51288" cy="51288"/>
+            </a:xfrm>
+            <a:prstGeom prst="ellipse">
+              <a:avLst/>
+            </a:prstGeom>
+            <a:solidFill>
+              <a:srgbClr val="F4F1EA"/>
+            </a:solidFill>
+            <a:ln>
+              <a:noFill/>
+            </a:ln>
+            <a:effectLst/>
+          </p:spPr>
+          <p:style>
+            <a:lnRef idx="1">
+              <a:schemeClr val="accent1"/>
+            </a:lnRef>
+            <a:fillRef idx="3">
+              <a:schemeClr val="accent1"/>
+            </a:fillRef>
+            <a:effectRef idx="2">
+              <a:schemeClr val="accent1"/>
+            </a:effectRef>
+            <a:fontRef idx="minor">
+              <a:schemeClr val="lt1"/>
+            </a:fontRef>
+          </p:style>
+          <p:txBody>
+            <a:bodyPr rtlCol="0" anchor="ctr"/>
+            <a:lstStyle/>
+            <a:p>
+              <a:pPr algn="ctr"/>
+            </a:p>
+          </p:txBody>
+        </p:sp>
+        <p:sp>
+          <p:nvSpPr>
+            <p:cNvPr id="40" name="Block Arc 39"/>
+            <p:cNvSpPr/>
+            <p:nvPr/>
+          </p:nvSpPr>
+          <p:spPr>
+            <a:xfrm rot="10800000">
+              <a:off x="8015653" y="17026303"/>
+              <a:ext cx="161192" cy="117230"/>
+            </a:xfrm>
+            <a:prstGeom prst="blockArc">
+              <a:avLst>
+                <a:gd name="adj1" fmla="val 10800000"/>
+                <a:gd name="adj2" fmla="val 0"/>
+                <a:gd name="adj3" fmla="val 18000"/>
+              </a:avLst>
+            </a:prstGeom>
+            <a:solidFill>
+              <a:srgbClr val="F4F1EA"/>
+            </a:solidFill>
+            <a:ln>
+              <a:noFill/>
+            </a:ln>
+            <a:effectLst/>
+          </p:spPr>
+          <p:style>
+            <a:lnRef idx="1">
+              <a:schemeClr val="accent1"/>
+            </a:lnRef>
+            <a:fillRef idx="3">
+              <a:schemeClr val="accent1"/>
+            </a:fillRef>
+            <a:effectRef idx="2">
+              <a:schemeClr val="accent1"/>
+            </a:effectRef>
+            <a:fontRef idx="minor">
+              <a:schemeClr val="lt1"/>
+            </a:fontRef>
+          </p:style>
+          <p:txBody>
+            <a:bodyPr rtlCol="0" anchor="ctr"/>
+            <a:lstStyle/>
+            <a:p>
+              <a:pPr algn="ctr"/>
+            </a:p>
+          </p:txBody>
+        </p:sp>
+      </p:grpSp>
+      <p:grpSp>
+        <p:nvGrpSpPr>
+          <p:cNvPr id="41" name="Group 40"/>
+          <p:cNvGrpSpPr/>
+          <p:nvPr/>
+        </p:nvGrpSpPr>
+        <p:grpSpPr>
+          <a:xfrm rot="21360000">
+            <a:off x="0" y="0"/>
+            <a:ext cx="6062662" cy="17049749"/>
+            <a:chOff x="0" y="0"/>
+            <a:chExt cx="6062662" cy="17049749"/>
+          </a:xfrm>
+        </p:grpSpPr>
+        <p:sp>
+          <p:nvSpPr>
+            <p:cNvPr id="42" name="Rounded Rectangle 41"/>
+            <p:cNvSpPr/>
+            <p:nvPr/>
+          </p:nvSpPr>
+          <p:spPr>
+            <a:xfrm>
+              <a:off x="5107305" y="16159162"/>
+              <a:ext cx="453390" cy="890587"/>
+            </a:xfrm>
+            <a:prstGeom prst="roundRect">
+              <a:avLst/>
+            </a:prstGeom>
+            <a:solidFill>
+              <a:srgbClr val="FFFDF7"/>
+            </a:solidFill>
+            <a:ln w="57150">
+              <a:solidFill>
+                <a:srgbClr val="FFFFFF"/>
+              </a:solidFill>
+            </a:ln>
+            <a:effectLst>
+              <a:outerShdw blurRad="228600" dist="76200" dir="5400000" algn="t" rotWithShape="0">
+                <a:srgbClr val="000000">
+                  <a:alpha val="30000"/>
+                </a:srgbClr>
+              </a:outerShdw>
+            </a:effectLst>
+          </p:spPr>
+          <p:style>
+            <a:lnRef idx="1">
+              <a:schemeClr val="accent1"/>
+            </a:lnRef>
+            <a:fillRef idx="3">
+              <a:schemeClr val="accent1"/>
+            </a:fillRef>
+            <a:effectRef idx="2">
+              <a:schemeClr val="accent1"/>
+            </a:effectRef>
+            <a:fontRef idx="minor">
+              <a:schemeClr val="lt1"/>
+            </a:fontRef>
+          </p:style>
+          <p:txBody>
+            <a:bodyPr rtlCol="0" anchor="ctr"/>
+            <a:lstStyle/>
+            <a:p>
+              <a:pPr algn="ctr"/>
+            </a:p>
+          </p:txBody>
+        </p:sp>
+        <p:sp>
+          <p:nvSpPr>
+            <p:cNvPr id="43" name="Chord 42"/>
+            <p:cNvSpPr/>
+            <p:nvPr/>
+          </p:nvSpPr>
+          <p:spPr>
+            <a:xfrm>
+              <a:off x="4605337" y="15511462"/>
+              <a:ext cx="1457325" cy="1295400"/>
+            </a:xfrm>
+            <a:prstGeom prst="chord">
+              <a:avLst/>
+            </a:prstGeom>
+            <a:solidFill>
+              <a:srgbClr val="B98A5E"/>
+            </a:solidFill>
+            <a:ln w="57150">
+              <a:solidFill>
+                <a:srgbClr val="FFFFFF"/>
+              </a:solidFill>
+            </a:ln>
+            <a:effectLst/>
+          </p:spPr>
+          <p:style>
+            <a:lnRef idx="1">
+              <a:schemeClr val="accent1"/>
+            </a:lnRef>
+            <a:fillRef idx="3">
+              <a:schemeClr val="accent1"/>
+            </a:fillRef>
+            <a:effectRef idx="2">
+              <a:schemeClr val="accent1"/>
+            </a:effectRef>
+            <a:fontRef idx="minor">
+              <a:schemeClr val="lt1"/>
+            </a:fontRef>
+          </p:style>
+          <p:txBody>
+            <a:bodyPr rtlCol="0" anchor="ctr"/>
+            <a:lstStyle/>
+            <a:p>
+              <a:pPr algn="ctr"/>
+            </a:p>
+          </p:txBody>
+        </p:sp>
+        <p:sp>
+          <p:nvSpPr>
+            <p:cNvPr id="44" name="Oval 43"/>
+            <p:cNvSpPr/>
+            <p:nvPr/>
+          </p:nvSpPr>
+          <p:spPr>
+            <a:xfrm>
+              <a:off x="4929187" y="15721965"/>
+              <a:ext cx="161925" cy="129540"/>
+            </a:xfrm>
+            <a:prstGeom prst="ellipse">
+              <a:avLst/>
+            </a:prstGeom>
+            <a:solidFill>
+              <a:srgbClr val="FFFDF7"/>
+            </a:solidFill>
+            <a:ln>
+              <a:noFill/>
+            </a:ln>
+            <a:effectLst/>
+          </p:spPr>
+          <p:style>
+            <a:lnRef idx="1">
+              <a:schemeClr val="accent1"/>
+            </a:lnRef>
+            <a:fillRef idx="3">
+              <a:schemeClr val="accent1"/>
+            </a:fillRef>
+            <a:effectRef idx="2">
+              <a:schemeClr val="accent1"/>
+            </a:effectRef>
+            <a:fontRef idx="minor">
+              <a:schemeClr val="lt1"/>
+            </a:fontRef>
+          </p:style>
+          <p:txBody>
+            <a:bodyPr rtlCol="0" anchor="ctr"/>
+            <a:lstStyle/>
+            <a:p>
+              <a:pPr algn="ctr"/>
+            </a:p>
+          </p:txBody>
+        </p:sp>
+        <p:sp>
+          <p:nvSpPr>
+            <p:cNvPr id="45" name="Oval 44"/>
+            <p:cNvSpPr/>
+            <p:nvPr/>
+          </p:nvSpPr>
+          <p:spPr>
+            <a:xfrm>
+              <a:off x="5447347" y="15624810"/>
+              <a:ext cx="161925" cy="129540"/>
+            </a:xfrm>
+            <a:prstGeom prst="ellipse">
+              <a:avLst/>
+            </a:prstGeom>
+            <a:solidFill>
+              <a:srgbClr val="FFFDF7"/>
+            </a:solidFill>
+            <a:ln>
+              <a:noFill/>
+            </a:ln>
+            <a:effectLst/>
+          </p:spPr>
+          <p:style>
+            <a:lnRef idx="1">
+              <a:schemeClr val="accent1"/>
+            </a:lnRef>
+            <a:fillRef idx="3">
+              <a:schemeClr val="accent1"/>
+            </a:fillRef>
+            <a:effectRef idx="2">
+              <a:schemeClr val="accent1"/>
+            </a:effectRef>
+            <a:fontRef idx="minor">
+              <a:schemeClr val="lt1"/>
+            </a:fontRef>
+          </p:style>
+          <p:txBody>
+            <a:bodyPr rtlCol="0" anchor="ctr"/>
+            <a:lstStyle/>
+            <a:p>
+              <a:pPr algn="ctr"/>
+            </a:p>
+          </p:txBody>
+        </p:sp>
+        <p:sp>
+          <p:nvSpPr>
+            <p:cNvPr id="46" name="Oval 45"/>
+            <p:cNvSpPr/>
+            <p:nvPr/>
+          </p:nvSpPr>
+          <p:spPr>
+            <a:xfrm>
+              <a:off x="5657850" y="15851505"/>
+              <a:ext cx="161925" cy="129540"/>
+            </a:xfrm>
+            <a:prstGeom prst="ellipse">
+              <a:avLst/>
+            </a:prstGeom>
+            <a:solidFill>
+              <a:srgbClr val="FFFDF7"/>
+            </a:solidFill>
+            <a:ln>
+              <a:noFill/>
+            </a:ln>
+            <a:effectLst/>
+          </p:spPr>
+          <p:style>
+            <a:lnRef idx="1">
+              <a:schemeClr val="accent1"/>
+            </a:lnRef>
+            <a:fillRef idx="3">
+              <a:schemeClr val="accent1"/>
+            </a:fillRef>
+            <a:effectRef idx="2">
+              <a:schemeClr val="accent1"/>
+            </a:effectRef>
+            <a:fontRef idx="minor">
+              <a:schemeClr val="lt1"/>
+            </a:fontRef>
+          </p:style>
+          <p:txBody>
+            <a:bodyPr rtlCol="0" anchor="ctr"/>
+            <a:lstStyle/>
+            <a:p>
+              <a:pPr algn="ctr"/>
+            </a:p>
+          </p:txBody>
+        </p:sp>
+        <p:sp>
+          <p:nvSpPr>
+            <p:cNvPr id="47" name="Oval 46"/>
+            <p:cNvSpPr/>
+            <p:nvPr/>
+          </p:nvSpPr>
+          <p:spPr>
+            <a:xfrm>
+              <a:off x="5228748" y="16545083"/>
+              <a:ext cx="37782" cy="37782"/>
+            </a:xfrm>
+            <a:prstGeom prst="ellipse">
+              <a:avLst/>
+            </a:prstGeom>
+            <a:solidFill>
+              <a:srgbClr val="4F3433"/>
+            </a:solidFill>
+            <a:ln>
+              <a:noFill/>
+            </a:ln>
+            <a:effectLst/>
+          </p:spPr>
+          <p:style>
+            <a:lnRef idx="1">
+              <a:schemeClr val="accent1"/>
+            </a:lnRef>
+            <a:fillRef idx="3">
+              <a:schemeClr val="accent1"/>
+            </a:fillRef>
+            <a:effectRef idx="2">
+              <a:schemeClr val="accent1"/>
+            </a:effectRef>
+            <a:fontRef idx="minor">
+              <a:schemeClr val="lt1"/>
+            </a:fontRef>
+          </p:style>
+          <p:txBody>
+            <a:bodyPr rtlCol="0" anchor="ctr"/>
+            <a:lstStyle/>
+            <a:p>
+              <a:pPr algn="ctr"/>
+            </a:p>
+          </p:txBody>
+        </p:sp>
+        <p:sp>
+          <p:nvSpPr>
+            <p:cNvPr id="48" name="Oval 47"/>
+            <p:cNvSpPr/>
+            <p:nvPr/>
+          </p:nvSpPr>
+          <p:spPr>
+            <a:xfrm>
+              <a:off x="5401468" y="16545083"/>
+              <a:ext cx="37782" cy="37782"/>
+            </a:xfrm>
+            <a:prstGeom prst="ellipse">
+              <a:avLst/>
+            </a:prstGeom>
+            <a:solidFill>
+              <a:srgbClr val="4F3433"/>
+            </a:solidFill>
+            <a:ln>
+              <a:noFill/>
+            </a:ln>
+            <a:effectLst/>
+          </p:spPr>
+          <p:style>
+            <a:lnRef idx="1">
+              <a:schemeClr val="accent1"/>
+            </a:lnRef>
+            <a:fillRef idx="3">
+              <a:schemeClr val="accent1"/>
+            </a:fillRef>
+            <a:effectRef idx="2">
+              <a:schemeClr val="accent1"/>
+            </a:effectRef>
+            <a:fontRef idx="minor">
+              <a:schemeClr val="lt1"/>
+            </a:fontRef>
+          </p:style>
+          <p:txBody>
+            <a:bodyPr rtlCol="0" anchor="ctr"/>
+            <a:lstStyle/>
+            <a:p>
+              <a:pPr algn="ctr"/>
+            </a:p>
+          </p:txBody>
+        </p:sp>
+        <p:sp>
+          <p:nvSpPr>
+            <p:cNvPr id="49" name="Block Arc 48"/>
+            <p:cNvSpPr/>
+            <p:nvPr/>
+          </p:nvSpPr>
+          <p:spPr>
+            <a:xfrm rot="10800000">
+              <a:off x="5274627" y="16574770"/>
+              <a:ext cx="118745" cy="86360"/>
+            </a:xfrm>
+            <a:prstGeom prst="blockArc">
+              <a:avLst>
+                <a:gd name="adj1" fmla="val 10800000"/>
+                <a:gd name="adj2" fmla="val 0"/>
+                <a:gd name="adj3" fmla="val 18000"/>
+              </a:avLst>
+            </a:prstGeom>
+            <a:solidFill>
+              <a:srgbClr val="4F3433"/>
+            </a:solidFill>
+            <a:ln>
+              <a:noFill/>
+            </a:ln>
+            <a:effectLst/>
+          </p:spPr>
+          <p:style>
+            <a:lnRef idx="1">
+              <a:schemeClr val="accent1"/>
+            </a:lnRef>
+            <a:fillRef idx="3">
+              <a:schemeClr val="accent1"/>
+            </a:fillRef>
+            <a:effectRef idx="2">
+              <a:schemeClr val="accent1"/>
+            </a:effectRef>
+            <a:fontRef idx="minor">
+              <a:schemeClr val="lt1"/>
+            </a:fontRef>
+          </p:style>
+          <p:txBody>
+            <a:bodyPr rtlCol="0" anchor="ctr"/>
+            <a:lstStyle/>
+            <a:p>
+              <a:pPr algn="ctr"/>
+            </a:p>
+          </p:txBody>
+        </p:sp>
+      </p:grpSp>
+      <p:grpSp>
+        <p:nvGrpSpPr>
+          <p:cNvPr id="50" name="Group 49"/>
+          <p:cNvGrpSpPr/>
+          <p:nvPr/>
+        </p:nvGrpSpPr>
+        <p:grpSpPr>
+          <a:xfrm rot="480000">
+            <a:off x="0" y="0"/>
+            <a:ext cx="3589020" cy="16830675"/>
+            <a:chOff x="0" y="0"/>
+            <a:chExt cx="3589020" cy="16830675"/>
+          </a:xfrm>
+        </p:grpSpPr>
+        <p:sp>
+          <p:nvSpPr>
+            <p:cNvPr id="51" name="Rectangle 50"/>
+            <p:cNvSpPr/>
+            <p:nvPr/>
+          </p:nvSpPr>
+          <p:spPr>
+            <a:xfrm>
+              <a:off x="3114675" y="15716250"/>
+              <a:ext cx="57150" cy="1114425"/>
+            </a:xfrm>
+            <a:prstGeom prst="rect">
+              <a:avLst/>
+            </a:prstGeom>
+            <a:solidFill>
+              <a:srgbClr val="7FA05A"/>
+            </a:solidFill>
+            <a:ln>
+              <a:noFill/>
+            </a:ln>
+            <a:effectLst/>
+          </p:spPr>
+          <p:style>
+            <a:lnRef idx="1">
+              <a:schemeClr val="accent1"/>
+            </a:lnRef>
+            <a:fillRef idx="3">
+              <a:schemeClr val="accent1"/>
+            </a:fillRef>
+            <a:effectRef idx="2">
+              <a:schemeClr val="accent1"/>
+            </a:effectRef>
+            <a:fontRef idx="minor">
+              <a:schemeClr val="lt1"/>
+            </a:fontRef>
+          </p:style>
+          <p:txBody>
+            <a:bodyPr rtlCol="0" anchor="ctr"/>
+            <a:lstStyle/>
+            <a:p>
+              <a:pPr algn="ctr"/>
+            </a:p>
+          </p:txBody>
+        </p:sp>
+        <p:sp>
+          <p:nvSpPr>
+            <p:cNvPr id="52" name="Oval 51"/>
+            <p:cNvSpPr/>
+            <p:nvPr/>
+          </p:nvSpPr>
+          <p:spPr>
+            <a:xfrm rot="19800000">
+              <a:off x="3162300" y="16273462"/>
+              <a:ext cx="385762" cy="171450"/>
+            </a:xfrm>
+            <a:prstGeom prst="ellipse">
+              <a:avLst/>
+            </a:prstGeom>
+            <a:solidFill>
+              <a:srgbClr val="59A66C"/>
+            </a:solidFill>
+            <a:ln w="57150">
+              <a:solidFill>
+                <a:srgbClr val="FFFFFF"/>
+              </a:solidFill>
+            </a:ln>
+            <a:effectLst/>
+          </p:spPr>
+          <p:style>
+            <a:lnRef idx="1">
+              <a:schemeClr val="accent1"/>
+            </a:lnRef>
+            <a:fillRef idx="3">
+              <a:schemeClr val="accent1"/>
+            </a:fillRef>
+            <a:effectRef idx="2">
+              <a:schemeClr val="accent1"/>
+            </a:effectRef>
+            <a:fontRef idx="minor">
+              <a:schemeClr val="lt1"/>
+            </a:fontRef>
+          </p:style>
+          <p:txBody>
+            <a:bodyPr rtlCol="0" anchor="ctr"/>
+            <a:lstStyle/>
+            <a:p>
+              <a:pPr algn="ctr"/>
+            </a:p>
+          </p:txBody>
+        </p:sp>
+        <p:sp>
+          <p:nvSpPr>
+            <p:cNvPr id="53" name="Oval 52"/>
+            <p:cNvSpPr/>
+            <p:nvPr/>
+          </p:nvSpPr>
+          <p:spPr>
+            <a:xfrm>
+              <a:off x="3228975" y="15596235"/>
+              <a:ext cx="360045" cy="240030"/>
+            </a:xfrm>
+            <a:prstGeom prst="ellipse">
+              <a:avLst/>
+            </a:prstGeom>
+            <a:solidFill>
+              <a:srgbClr val="F2CF5B"/>
+            </a:solidFill>
+            <a:ln w="38100">
+              <a:solidFill>
+                <a:srgbClr val="FFFFFF"/>
+              </a:solidFill>
+            </a:ln>
+            <a:effectLst/>
+          </p:spPr>
+          <p:style>
+            <a:lnRef idx="1">
+              <a:schemeClr val="accent1"/>
+            </a:lnRef>
+            <a:fillRef idx="3">
+              <a:schemeClr val="accent1"/>
+            </a:fillRef>
+            <a:effectRef idx="2">
+              <a:schemeClr val="accent1"/>
+            </a:effectRef>
+            <a:fontRef idx="minor">
+              <a:schemeClr val="lt1"/>
+            </a:fontRef>
+          </p:style>
+          <p:txBody>
+            <a:bodyPr rtlCol="0" anchor="ctr"/>
+            <a:lstStyle/>
+            <a:p>
+              <a:pPr algn="ctr"/>
+            </a:p>
+          </p:txBody>
+        </p:sp>
+        <p:sp>
+          <p:nvSpPr>
+            <p:cNvPr id="54" name="Oval 53"/>
+            <p:cNvSpPr/>
+            <p:nvPr/>
+          </p:nvSpPr>
+          <p:spPr>
+            <a:xfrm rot="3600000">
+              <a:off x="3096101" y="15826379"/>
+              <a:ext cx="360045" cy="240030"/>
+            </a:xfrm>
+            <a:prstGeom prst="ellipse">
+              <a:avLst/>
+            </a:prstGeom>
+            <a:solidFill>
+              <a:srgbClr val="F2CF5B"/>
+            </a:solidFill>
+            <a:ln w="38100">
+              <a:solidFill>
+                <a:srgbClr val="FFFFFF"/>
+              </a:solidFill>
+            </a:ln>
+            <a:effectLst/>
+          </p:spPr>
+          <p:style>
+            <a:lnRef idx="1">
+              <a:schemeClr val="accent1"/>
+            </a:lnRef>
+            <a:fillRef idx="3">
+              <a:schemeClr val="accent1"/>
+            </a:fillRef>
+            <a:effectRef idx="2">
+              <a:schemeClr val="accent1"/>
+            </a:effectRef>
+            <a:fontRef idx="minor">
+              <a:schemeClr val="lt1"/>
+            </a:fontRef>
+          </p:style>
+          <p:txBody>
+            <a:bodyPr rtlCol="0" anchor="ctr"/>
+            <a:lstStyle/>
+            <a:p>
+              <a:pPr algn="ctr"/>
+            </a:p>
+          </p:txBody>
+        </p:sp>
+        <p:sp>
+          <p:nvSpPr>
+            <p:cNvPr id="55" name="Oval 54"/>
+            <p:cNvSpPr/>
+            <p:nvPr/>
+          </p:nvSpPr>
+          <p:spPr>
+            <a:xfrm rot="7200000">
+              <a:off x="2830353" y="15826379"/>
+              <a:ext cx="360045" cy="240030"/>
+            </a:xfrm>
+            <a:prstGeom prst="ellipse">
+              <a:avLst/>
+            </a:prstGeom>
+            <a:solidFill>
+              <a:srgbClr val="F2CF5B"/>
+            </a:solidFill>
+            <a:ln w="38100">
+              <a:solidFill>
+                <a:srgbClr val="FFFFFF"/>
+              </a:solidFill>
+            </a:ln>
+            <a:effectLst/>
+          </p:spPr>
+          <p:style>
+            <a:lnRef idx="1">
+              <a:schemeClr val="accent1"/>
+            </a:lnRef>
+            <a:fillRef idx="3">
+              <a:schemeClr val="accent1"/>
+            </a:fillRef>
+            <a:effectRef idx="2">
+              <a:schemeClr val="accent1"/>
+            </a:effectRef>
+            <a:fontRef idx="minor">
+              <a:schemeClr val="lt1"/>
+            </a:fontRef>
+          </p:style>
+          <p:txBody>
+            <a:bodyPr rtlCol="0" anchor="ctr"/>
+            <a:lstStyle/>
+            <a:p>
+              <a:pPr algn="ctr"/>
+            </a:p>
+          </p:txBody>
+        </p:sp>
+        <p:sp>
+          <p:nvSpPr>
+            <p:cNvPr id="56" name="Oval 55"/>
+            <p:cNvSpPr/>
+            <p:nvPr/>
+          </p:nvSpPr>
+          <p:spPr>
+            <a:xfrm rot="10800000">
+              <a:off x="2697480" y="15596235"/>
+              <a:ext cx="360045" cy="240030"/>
+            </a:xfrm>
+            <a:prstGeom prst="ellipse">
+              <a:avLst/>
+            </a:prstGeom>
+            <a:solidFill>
+              <a:srgbClr val="F2CF5B"/>
+            </a:solidFill>
+            <a:ln w="38100">
+              <a:solidFill>
+                <a:srgbClr val="FFFFFF"/>
+              </a:solidFill>
+            </a:ln>
+            <a:effectLst/>
+          </p:spPr>
+          <p:style>
+            <a:lnRef idx="1">
+              <a:schemeClr val="accent1"/>
+            </a:lnRef>
+            <a:fillRef idx="3">
+              <a:schemeClr val="accent1"/>
+            </a:fillRef>
+            <a:effectRef idx="2">
+              <a:schemeClr val="accent1"/>
+            </a:effectRef>
+            <a:fontRef idx="minor">
+              <a:schemeClr val="lt1"/>
+            </a:fontRef>
+          </p:style>
+          <p:txBody>
+            <a:bodyPr rtlCol="0" anchor="ctr"/>
+            <a:lstStyle/>
+            <a:p>
+              <a:pPr algn="ctr"/>
+            </a:p>
+          </p:txBody>
+        </p:sp>
+        <p:sp>
+          <p:nvSpPr>
+            <p:cNvPr id="57" name="Oval 56"/>
+            <p:cNvSpPr/>
+            <p:nvPr/>
+          </p:nvSpPr>
+          <p:spPr>
+            <a:xfrm rot="14400000">
+              <a:off x="2830353" y="15366090"/>
+              <a:ext cx="360045" cy="240030"/>
+            </a:xfrm>
+            <a:prstGeom prst="ellipse">
+              <a:avLst/>
+            </a:prstGeom>
+            <a:solidFill>
+              <a:srgbClr val="F2CF5B"/>
+            </a:solidFill>
+            <a:ln w="38100">
+              <a:solidFill>
+                <a:srgbClr val="FFFFFF"/>
+              </a:solidFill>
+            </a:ln>
+            <a:effectLst/>
+          </p:spPr>
+          <p:style>
+            <a:lnRef idx="1">
+              <a:schemeClr val="accent1"/>
+            </a:lnRef>
+            <a:fillRef idx="3">
+              <a:schemeClr val="accent1"/>
+            </a:fillRef>
+            <a:effectRef idx="2">
+              <a:schemeClr val="accent1"/>
+            </a:effectRef>
+            <a:fontRef idx="minor">
+              <a:schemeClr val="lt1"/>
+            </a:fontRef>
+          </p:style>
+          <p:txBody>
+            <a:bodyPr rtlCol="0" anchor="ctr"/>
+            <a:lstStyle/>
+            <a:p>
+              <a:pPr algn="ctr"/>
+            </a:p>
+          </p:txBody>
+        </p:sp>
+        <p:sp>
+          <p:nvSpPr>
+            <p:cNvPr id="58" name="Oval 57"/>
+            <p:cNvSpPr/>
+            <p:nvPr/>
+          </p:nvSpPr>
+          <p:spPr>
+            <a:xfrm rot="18000000">
+              <a:off x="3096101" y="15366090"/>
+              <a:ext cx="360045" cy="240030"/>
+            </a:xfrm>
+            <a:prstGeom prst="ellipse">
+              <a:avLst/>
+            </a:prstGeom>
+            <a:solidFill>
+              <a:srgbClr val="F2CF5B"/>
+            </a:solidFill>
+            <a:ln w="38100">
+              <a:solidFill>
+                <a:srgbClr val="FFFFFF"/>
+              </a:solidFill>
+            </a:ln>
+            <a:effectLst/>
+          </p:spPr>
+          <p:style>
+            <a:lnRef idx="1">
+              <a:schemeClr val="accent1"/>
+            </a:lnRef>
+            <a:fillRef idx="3">
+              <a:schemeClr val="accent1"/>
+            </a:fillRef>
+            <a:effectRef idx="2">
+              <a:schemeClr val="accent1"/>
+            </a:effectRef>
+            <a:fontRef idx="minor">
+              <a:schemeClr val="lt1"/>
+            </a:fontRef>
+          </p:style>
+          <p:txBody>
+            <a:bodyPr rtlCol="0" anchor="ctr"/>
+            <a:lstStyle/>
+            <a:p>
+              <a:pPr algn="ctr"/>
+            </a:p>
+          </p:txBody>
+        </p:sp>
+        <p:sp>
+          <p:nvSpPr>
+            <p:cNvPr id="59" name="Oval 58"/>
+            <p:cNvSpPr/>
+            <p:nvPr/>
+          </p:nvSpPr>
+          <p:spPr>
+            <a:xfrm>
+              <a:off x="2980372" y="15553372"/>
+              <a:ext cx="325755" cy="325755"/>
+            </a:xfrm>
+            <a:prstGeom prst="ellipse">
+              <a:avLst/>
+            </a:prstGeom>
+            <a:solidFill>
+              <a:srgbClr val="8C6A4E"/>
+            </a:solidFill>
+            <a:ln w="38100">
+              <a:solidFill>
+                <a:srgbClr val="FFFFFF"/>
+              </a:solidFill>
+            </a:ln>
+            <a:effectLst/>
+          </p:spPr>
+          <p:style>
+            <a:lnRef idx="1">
+              <a:schemeClr val="accent1"/>
+            </a:lnRef>
+            <a:fillRef idx="3">
+              <a:schemeClr val="accent1"/>
+            </a:fillRef>
+            <a:effectRef idx="2">
+              <a:schemeClr val="accent1"/>
+            </a:effectRef>
+            <a:fontRef idx="minor">
+              <a:schemeClr val="lt1"/>
+            </a:fontRef>
+          </p:style>
+          <p:txBody>
+            <a:bodyPr rtlCol="0" anchor="ctr"/>
+            <a:lstStyle/>
+            <a:p>
+              <a:pPr algn="ctr"/>
+            </a:p>
+          </p:txBody>
+        </p:sp>
+      </p:grpSp>
+      <p:pic>
+        <p:nvPicPr>
+          <p:cNvPr id="60" name="Picture 59" descr="foundation-logo-color.png"/>
+          <p:cNvPicPr>
+            <a:picLocks noChangeAspect="1"/>
+          </p:cNvPicPr>
+          <p:nvPr/>
+        </p:nvPicPr>
+        <p:blipFill>
+          <a:blip r:embed="rId7"/>
           <a:stretch>
             <a:fillRect/>
           </a:stretch>
